--- a/Day16/16-paev-andmetarkus-esitlus.pptx
+++ b/Day16/16-paev-andmetarkus-esitlus.pptx
@@ -5,41 +5,40 @@
     <p:sldMasterId id="2147483648" r:id="rId4"/>
   </p:sldMasterIdLst>
   <p:notesMasterIdLst>
-    <p:notesMasterId r:id="rId10"/>
+    <p:notesMasterId r:id="rId9"/>
   </p:notesMasterIdLst>
   <p:handoutMasterIdLst>
-    <p:handoutMasterId r:id="rId11"/>
+    <p:handoutMasterId r:id="rId10"/>
   </p:handoutMasterIdLst>
   <p:sldIdLst>
     <p:sldId id="417" r:id="rId5"/>
     <p:sldId id="493" r:id="rId6"/>
     <p:sldId id="574" r:id="rId7"/>
-    <p:sldId id="645" r:id="rId8"/>
-    <p:sldId id="538" r:id="rId9"/>
+    <p:sldId id="538" r:id="rId8"/>
   </p:sldIdLst>
   <p:sldSz cx="12192000" cy="6858000"/>
   <p:notesSz cx="6858000" cy="9144000"/>
   <p:embeddedFontLst>
     <p:embeddedFont>
       <p:font typeface="Inter" panose="020B0604020202020204" charset="0"/>
-      <p:regular r:id="rId12"/>
+      <p:regular r:id="rId11"/>
+      <p:bold r:id="rId12"/>
+    </p:embeddedFont>
+    <p:embeddedFont>
+      <p:font typeface="Inter Bold" panose="020B0604020202020204" charset="0"/>
       <p:bold r:id="rId13"/>
     </p:embeddedFont>
     <p:embeddedFont>
-      <p:font typeface="Inter Bold" panose="020B0604020202020204" charset="0"/>
-      <p:bold r:id="rId14"/>
-    </p:embeddedFont>
-    <p:embeddedFont>
       <p:font typeface="Noto Serif" panose="02020600060500020200" pitchFamily="18" charset="0"/>
-      <p:regular r:id="rId15"/>
-      <p:bold r:id="rId16"/>
-      <p:italic r:id="rId17"/>
-      <p:boldItalic r:id="rId18"/>
+      <p:regular r:id="rId14"/>
+      <p:bold r:id="rId15"/>
+      <p:italic r:id="rId16"/>
+      <p:boldItalic r:id="rId17"/>
     </p:embeddedFont>
     <p:embeddedFont>
       <p:font typeface="Poppins SemiBold" panose="00000700000000000000" pitchFamily="2" charset="0"/>
-      <p:bold r:id="rId19"/>
-      <p:boldItalic r:id="rId20"/>
+      <p:bold r:id="rId18"/>
+      <p:boldItalic r:id="rId19"/>
     </p:embeddedFont>
   </p:embeddedFontLst>
   <p:defaultTextStyle>
@@ -151,7 +150,7 @@
 <file path=ppt/revisionInfo.xml><?xml version="1.0" encoding="utf-8"?>
 <p1510:revInfo xmlns:a="http://schemas.openxmlformats.org/drawingml/2006/main" xmlns:r="http://schemas.openxmlformats.org/officeDocument/2006/relationships" xmlns:p1510="http://schemas.microsoft.com/office/powerpoint/2015/10/main">
   <p1510:revLst>
-    <p1510:client id="{E7E87E02-988A-471B-B4D6-576392FB4990}" v="1" dt="2026-03-18T07:44:54.105"/>
+    <p1510:client id="{2D8B6431-46D4-4C35-9666-91325B1E5CED}" v="31" dt="2026-04-21T05:45:55.640"/>
   </p1510:revLst>
 </p1510:revInfo>
 </file>
@@ -161,47 +160,18 @@
   <pc:docChgLst>
     <pc:chgData name="Virve Räni" userId="161a7437-7ef4-49ec-91bf-54882f313dfe" providerId="ADAL" clId="{6D754EED-65AA-4A21-B175-6769012CF487}"/>
     <pc:docChg chg="addSld delSld modSld sldOrd">
-      <pc:chgData name="Virve Räni" userId="161a7437-7ef4-49ec-91bf-54882f313dfe" providerId="ADAL" clId="{6D754EED-65AA-4A21-B175-6769012CF487}" dt="2026-03-18T07:44:54.102" v="286"/>
+      <pc:chgData name="Virve Räni" userId="161a7437-7ef4-49ec-91bf-54882f313dfe" providerId="ADAL" clId="{6D754EED-65AA-4A21-B175-6769012CF487}" dt="2026-04-21T05:45:55.640" v="336" actId="20577"/>
       <pc:docMkLst>
         <pc:docMk/>
       </pc:docMkLst>
-      <pc:sldChg chg="del">
-        <pc:chgData name="Virve Räni" userId="161a7437-7ef4-49ec-91bf-54882f313dfe" providerId="ADAL" clId="{6D754EED-65AA-4A21-B175-6769012CF487}" dt="2026-03-18T07:43:45.268" v="271" actId="47"/>
-        <pc:sldMkLst>
-          <pc:docMk/>
-          <pc:sldMk cId="223049910" sldId="439"/>
-        </pc:sldMkLst>
-      </pc:sldChg>
-      <pc:sldChg chg="del">
-        <pc:chgData name="Virve Räni" userId="161a7437-7ef4-49ec-91bf-54882f313dfe" providerId="ADAL" clId="{6D754EED-65AA-4A21-B175-6769012CF487}" dt="2026-03-18T07:43:45.268" v="271" actId="47"/>
-        <pc:sldMkLst>
-          <pc:docMk/>
-          <pc:sldMk cId="1393602165" sldId="440"/>
-        </pc:sldMkLst>
-      </pc:sldChg>
-      <pc:sldChg chg="del">
-        <pc:chgData name="Virve Räni" userId="161a7437-7ef4-49ec-91bf-54882f313dfe" providerId="ADAL" clId="{6D754EED-65AA-4A21-B175-6769012CF487}" dt="2026-03-18T07:43:45.268" v="271" actId="47"/>
-        <pc:sldMkLst>
-          <pc:docMk/>
-          <pc:sldMk cId="431318487" sldId="441"/>
-        </pc:sldMkLst>
-      </pc:sldChg>
       <pc:sldChg chg="modSp mod">
-        <pc:chgData name="Virve Räni" userId="161a7437-7ef4-49ec-91bf-54882f313dfe" providerId="ADAL" clId="{6D754EED-65AA-4A21-B175-6769012CF487}" dt="2026-03-18T07:43:36.571" v="270" actId="20577"/>
+        <pc:chgData name="Virve Räni" userId="161a7437-7ef4-49ec-91bf-54882f313dfe" providerId="ADAL" clId="{6D754EED-65AA-4A21-B175-6769012CF487}" dt="2026-04-21T05:45:26.586" v="295" actId="20577"/>
         <pc:sldMkLst>
           <pc:docMk/>
           <pc:sldMk cId="1135419376" sldId="493"/>
         </pc:sldMkLst>
-        <pc:spChg chg="mod">
-          <ac:chgData name="Virve Räni" userId="161a7437-7ef4-49ec-91bf-54882f313dfe" providerId="ADAL" clId="{6D754EED-65AA-4A21-B175-6769012CF487}" dt="2026-03-18T07:43:10.328" v="200" actId="20577"/>
-          <ac:spMkLst>
-            <pc:docMk/>
-            <pc:sldMk cId="1135419376" sldId="493"/>
-            <ac:spMk id="2" creationId="{11F10058-A289-F9F8-2CC8-43BAABEC6F7E}"/>
-          </ac:spMkLst>
-        </pc:spChg>
         <pc:graphicFrameChg chg="modGraphic">
-          <ac:chgData name="Virve Räni" userId="161a7437-7ef4-49ec-91bf-54882f313dfe" providerId="ADAL" clId="{6D754EED-65AA-4A21-B175-6769012CF487}" dt="2026-03-18T07:43:36.571" v="270" actId="20577"/>
+          <ac:chgData name="Virve Räni" userId="161a7437-7ef4-49ec-91bf-54882f313dfe" providerId="ADAL" clId="{6D754EED-65AA-4A21-B175-6769012CF487}" dt="2026-04-21T05:45:26.586" v="295" actId="20577"/>
           <ac:graphicFrameMkLst>
             <pc:docMk/>
             <pc:sldMk cId="1135419376" sldId="493"/>
@@ -209,183 +179,42 @@
           </ac:graphicFrameMkLst>
         </pc:graphicFrameChg>
       </pc:sldChg>
-      <pc:sldChg chg="del">
-        <pc:chgData name="Virve Räni" userId="161a7437-7ef4-49ec-91bf-54882f313dfe" providerId="ADAL" clId="{6D754EED-65AA-4A21-B175-6769012CF487}" dt="2026-03-18T07:43:45.268" v="271" actId="47"/>
-        <pc:sldMkLst>
-          <pc:docMk/>
-          <pc:sldMk cId="2265121631" sldId="501"/>
-        </pc:sldMkLst>
-      </pc:sldChg>
-      <pc:sldChg chg="del">
-        <pc:chgData name="Virve Räni" userId="161a7437-7ef4-49ec-91bf-54882f313dfe" providerId="ADAL" clId="{6D754EED-65AA-4A21-B175-6769012CF487}" dt="2026-03-18T07:43:45.268" v="271" actId="47"/>
-        <pc:sldMkLst>
-          <pc:docMk/>
-          <pc:sldMk cId="2443866233" sldId="504"/>
-        </pc:sldMkLst>
-      </pc:sldChg>
-      <pc:sldChg chg="add">
-        <pc:chgData name="Virve Räni" userId="161a7437-7ef4-49ec-91bf-54882f313dfe" providerId="ADAL" clId="{6D754EED-65AA-4A21-B175-6769012CF487}" dt="2026-03-18T07:44:54.102" v="286"/>
+      <pc:sldChg chg="modSp">
+        <pc:chgData name="Virve Räni" userId="161a7437-7ef4-49ec-91bf-54882f313dfe" providerId="ADAL" clId="{6D754EED-65AA-4A21-B175-6769012CF487}" dt="2026-04-21T05:45:55.640" v="336" actId="20577"/>
         <pc:sldMkLst>
           <pc:docMk/>
           <pc:sldMk cId="1694942831" sldId="538"/>
         </pc:sldMkLst>
+        <pc:spChg chg="mod">
+          <ac:chgData name="Virve Räni" userId="161a7437-7ef4-49ec-91bf-54882f313dfe" providerId="ADAL" clId="{6D754EED-65AA-4A21-B175-6769012CF487}" dt="2026-04-21T05:45:55.640" v="336" actId="20577"/>
+          <ac:spMkLst>
+            <pc:docMk/>
+            <pc:sldMk cId="1694942831" sldId="538"/>
+            <ac:spMk id="3" creationId="{CF773C7E-895D-19CD-768D-5D677901F556}"/>
+          </ac:spMkLst>
+        </pc:spChg>
       </pc:sldChg>
-      <pc:sldChg chg="del">
-        <pc:chgData name="Virve Räni" userId="161a7437-7ef4-49ec-91bf-54882f313dfe" providerId="ADAL" clId="{6D754EED-65AA-4A21-B175-6769012CF487}" dt="2026-03-18T07:43:45.268" v="271" actId="47"/>
+      <pc:sldChg chg="modSp mod">
+        <pc:chgData name="Virve Räni" userId="161a7437-7ef4-49ec-91bf-54882f313dfe" providerId="ADAL" clId="{6D754EED-65AA-4A21-B175-6769012CF487}" dt="2026-04-21T05:45:32.440" v="304" actId="20577"/>
         <pc:sldMkLst>
           <pc:docMk/>
-          <pc:sldMk cId="1917117433" sldId="566"/>
-        </pc:sldMkLst>
-      </pc:sldChg>
-      <pc:sldChg chg="del">
-        <pc:chgData name="Virve Räni" userId="161a7437-7ef4-49ec-91bf-54882f313dfe" providerId="ADAL" clId="{6D754EED-65AA-4A21-B175-6769012CF487}" dt="2026-03-18T07:43:45.268" v="271" actId="47"/>
-        <pc:sldMkLst>
-          <pc:docMk/>
-          <pc:sldMk cId="406148529" sldId="568"/>
-        </pc:sldMkLst>
-      </pc:sldChg>
-      <pc:sldChg chg="del">
-        <pc:chgData name="Virve Räni" userId="161a7437-7ef4-49ec-91bf-54882f313dfe" providerId="ADAL" clId="{6D754EED-65AA-4A21-B175-6769012CF487}" dt="2026-03-18T07:43:45.268" v="271" actId="47"/>
-        <pc:sldMkLst>
-          <pc:docMk/>
-          <pc:sldMk cId="4104031404" sldId="569"/>
-        </pc:sldMkLst>
-      </pc:sldChg>
-      <pc:sldChg chg="del">
-        <pc:chgData name="Virve Räni" userId="161a7437-7ef4-49ec-91bf-54882f313dfe" providerId="ADAL" clId="{6D754EED-65AA-4A21-B175-6769012CF487}" dt="2026-03-18T07:43:45.268" v="271" actId="47"/>
-        <pc:sldMkLst>
-          <pc:docMk/>
-          <pc:sldMk cId="1463216859" sldId="570"/>
-        </pc:sldMkLst>
-      </pc:sldChg>
-      <pc:sldChg chg="del">
-        <pc:chgData name="Virve Räni" userId="161a7437-7ef4-49ec-91bf-54882f313dfe" providerId="ADAL" clId="{6D754EED-65AA-4A21-B175-6769012CF487}" dt="2026-03-18T07:43:59.117" v="272" actId="47"/>
-        <pc:sldMkLst>
-          <pc:docMk/>
-          <pc:sldMk cId="2505963611" sldId="573"/>
-        </pc:sldMkLst>
-      </pc:sldChg>
-      <pc:sldChg chg="del">
-        <pc:chgData name="Virve Räni" userId="161a7437-7ef4-49ec-91bf-54882f313dfe" providerId="ADAL" clId="{6D754EED-65AA-4A21-B175-6769012CF487}" dt="2026-03-18T07:43:45.268" v="271" actId="47"/>
-        <pc:sldMkLst>
-          <pc:docMk/>
-          <pc:sldMk cId="689218347" sldId="575"/>
-        </pc:sldMkLst>
-      </pc:sldChg>
-      <pc:sldChg chg="del">
-        <pc:chgData name="Virve Räni" userId="161a7437-7ef4-49ec-91bf-54882f313dfe" providerId="ADAL" clId="{6D754EED-65AA-4A21-B175-6769012CF487}" dt="2026-03-18T07:43:45.268" v="271" actId="47"/>
-        <pc:sldMkLst>
-          <pc:docMk/>
-          <pc:sldMk cId="2888773393" sldId="576"/>
-        </pc:sldMkLst>
-      </pc:sldChg>
-      <pc:sldChg chg="del">
-        <pc:chgData name="Virve Räni" userId="161a7437-7ef4-49ec-91bf-54882f313dfe" providerId="ADAL" clId="{6D754EED-65AA-4A21-B175-6769012CF487}" dt="2026-03-18T07:43:45.268" v="271" actId="47"/>
-        <pc:sldMkLst>
-          <pc:docMk/>
-          <pc:sldMk cId="2968960742" sldId="577"/>
-        </pc:sldMkLst>
-      </pc:sldChg>
-      <pc:sldChg chg="del">
-        <pc:chgData name="Virve Räni" userId="161a7437-7ef4-49ec-91bf-54882f313dfe" providerId="ADAL" clId="{6D754EED-65AA-4A21-B175-6769012CF487}" dt="2026-03-18T07:43:45.268" v="271" actId="47"/>
-        <pc:sldMkLst>
-          <pc:docMk/>
-          <pc:sldMk cId="425404835" sldId="614"/>
-        </pc:sldMkLst>
-      </pc:sldChg>
-      <pc:sldChg chg="del">
-        <pc:chgData name="Virve Räni" userId="161a7437-7ef4-49ec-91bf-54882f313dfe" providerId="ADAL" clId="{6D754EED-65AA-4A21-B175-6769012CF487}" dt="2026-03-18T07:43:45.268" v="271" actId="47"/>
-        <pc:sldMkLst>
-          <pc:docMk/>
-          <pc:sldMk cId="391755497" sldId="615"/>
-        </pc:sldMkLst>
-      </pc:sldChg>
-      <pc:sldChg chg="del">
-        <pc:chgData name="Virve Räni" userId="161a7437-7ef4-49ec-91bf-54882f313dfe" providerId="ADAL" clId="{6D754EED-65AA-4A21-B175-6769012CF487}" dt="2026-03-18T07:43:45.268" v="271" actId="47"/>
-        <pc:sldMkLst>
-          <pc:docMk/>
-          <pc:sldMk cId="1715201260" sldId="616"/>
-        </pc:sldMkLst>
-      </pc:sldChg>
-      <pc:sldChg chg="del">
-        <pc:chgData name="Virve Räni" userId="161a7437-7ef4-49ec-91bf-54882f313dfe" providerId="ADAL" clId="{6D754EED-65AA-4A21-B175-6769012CF487}" dt="2026-03-18T07:43:45.268" v="271" actId="47"/>
-        <pc:sldMkLst>
-          <pc:docMk/>
-          <pc:sldMk cId="2738242998" sldId="617"/>
-        </pc:sldMkLst>
-      </pc:sldChg>
-      <pc:sldChg chg="del">
-        <pc:chgData name="Virve Räni" userId="161a7437-7ef4-49ec-91bf-54882f313dfe" providerId="ADAL" clId="{6D754EED-65AA-4A21-B175-6769012CF487}" dt="2026-03-18T07:43:45.268" v="271" actId="47"/>
-        <pc:sldMkLst>
-          <pc:docMk/>
-          <pc:sldMk cId="1879472682" sldId="618"/>
-        </pc:sldMkLst>
-      </pc:sldChg>
-      <pc:sldChg chg="modSp del mod">
-        <pc:chgData name="Virve Räni" userId="161a7437-7ef4-49ec-91bf-54882f313dfe" providerId="ADAL" clId="{6D754EED-65AA-4A21-B175-6769012CF487}" dt="2026-03-18T07:43:45.268" v="271" actId="47"/>
-        <pc:sldMkLst>
-          <pc:docMk/>
-          <pc:sldMk cId="3594503753" sldId="642"/>
+          <pc:sldMk cId="645017635" sldId="574"/>
         </pc:sldMkLst>
         <pc:spChg chg="mod">
-          <ac:chgData name="Virve Räni" userId="161a7437-7ef4-49ec-91bf-54882f313dfe" providerId="ADAL" clId="{6D754EED-65AA-4A21-B175-6769012CF487}" dt="2026-03-18T07:09:43.035" v="153" actId="20577"/>
+          <ac:chgData name="Virve Räni" userId="161a7437-7ef4-49ec-91bf-54882f313dfe" providerId="ADAL" clId="{6D754EED-65AA-4A21-B175-6769012CF487}" dt="2026-04-21T05:45:32.440" v="304" actId="20577"/>
           <ac:spMkLst>
             <pc:docMk/>
-            <pc:sldMk cId="3594503753" sldId="642"/>
-            <ac:spMk id="3" creationId="{3C81D5B4-C589-0639-1E36-78C95C29E601}"/>
+            <pc:sldMk cId="645017635" sldId="574"/>
+            <ac:spMk id="2" creationId="{D4725537-CB3E-C083-F8A7-F00B6AE12D6E}"/>
           </ac:spMkLst>
         </pc:spChg>
       </pc:sldChg>
       <pc:sldChg chg="del">
-        <pc:chgData name="Virve Räni" userId="161a7437-7ef4-49ec-91bf-54882f313dfe" providerId="ADAL" clId="{6D754EED-65AA-4A21-B175-6769012CF487}" dt="2026-03-18T07:09:21.196" v="151" actId="47"/>
-        <pc:sldMkLst>
-          <pc:docMk/>
-          <pc:sldMk cId="4166333113" sldId="643"/>
-        </pc:sldMkLst>
-      </pc:sldChg>
-      <pc:sldChg chg="del">
-        <pc:chgData name="Virve Räni" userId="161a7437-7ef4-49ec-91bf-54882f313dfe" providerId="ADAL" clId="{6D754EED-65AA-4A21-B175-6769012CF487}" dt="2026-03-18T07:11:23.421" v="154" actId="47"/>
-        <pc:sldMkLst>
-          <pc:docMk/>
-          <pc:sldMk cId="2066132299" sldId="644"/>
-        </pc:sldMkLst>
-      </pc:sldChg>
-      <pc:sldChg chg="modSp mod">
-        <pc:chgData name="Virve Räni" userId="161a7437-7ef4-49ec-91bf-54882f313dfe" providerId="ADAL" clId="{6D754EED-65AA-4A21-B175-6769012CF487}" dt="2026-03-18T07:44:06.366" v="285" actId="20577"/>
+        <pc:chgData name="Virve Räni" userId="161a7437-7ef4-49ec-91bf-54882f313dfe" providerId="ADAL" clId="{6D754EED-65AA-4A21-B175-6769012CF487}" dt="2026-04-21T05:45:38.109" v="305" actId="47"/>
         <pc:sldMkLst>
           <pc:docMk/>
           <pc:sldMk cId="1674079011" sldId="645"/>
         </pc:sldMkLst>
-        <pc:spChg chg="mod">
-          <ac:chgData name="Virve Räni" userId="161a7437-7ef4-49ec-91bf-54882f313dfe" providerId="ADAL" clId="{6D754EED-65AA-4A21-B175-6769012CF487}" dt="2026-03-18T07:44:06.366" v="285" actId="20577"/>
-          <ac:spMkLst>
-            <pc:docMk/>
-            <pc:sldMk cId="1674079011" sldId="645"/>
-            <ac:spMk id="2" creationId="{EF462382-376F-D403-218E-FAD6D454E702}"/>
-          </ac:spMkLst>
-        </pc:spChg>
-      </pc:sldChg>
-      <pc:sldChg chg="del">
-        <pc:chgData name="Virve Räni" userId="161a7437-7ef4-49ec-91bf-54882f313dfe" providerId="ADAL" clId="{6D754EED-65AA-4A21-B175-6769012CF487}" dt="2026-03-18T07:43:45.268" v="271" actId="47"/>
-        <pc:sldMkLst>
-          <pc:docMk/>
-          <pc:sldMk cId="4151671185" sldId="646"/>
-        </pc:sldMkLst>
-      </pc:sldChg>
-      <pc:sldChg chg="modSp del mod">
-        <pc:chgData name="Virve Räni" userId="161a7437-7ef4-49ec-91bf-54882f313dfe" providerId="ADAL" clId="{6D754EED-65AA-4A21-B175-6769012CF487}" dt="2026-03-18T07:43:45.268" v="271" actId="47"/>
-        <pc:sldMkLst>
-          <pc:docMk/>
-          <pc:sldMk cId="1871966603" sldId="647"/>
-        </pc:sldMkLst>
-        <pc:spChg chg="mod">
-          <ac:chgData name="Virve Räni" userId="161a7437-7ef4-49ec-91bf-54882f313dfe" providerId="ADAL" clId="{6D754EED-65AA-4A21-B175-6769012CF487}" dt="2026-03-18T07:14:04.301" v="168" actId="20577"/>
-          <ac:spMkLst>
-            <pc:docMk/>
-            <pc:sldMk cId="1871966603" sldId="647"/>
-            <ac:spMk id="3" creationId="{0F58F04F-79CF-D596-2442-C7AA52CDBB45}"/>
-          </ac:spMkLst>
-        </pc:spChg>
       </pc:sldChg>
     </pc:docChg>
   </pc:docChgLst>
@@ -486,7 +315,7 @@
           <a:p>
             <a:fld id="{F9D2AD6E-DEDD-49A0-A4BE-7A081A9112DA}" type="datetimeFigureOut">
               <a:rPr lang="en-US" smtClean="0"/>
-              <a:t>3/18/2026</a:t>
+              <a:t>4/21/2026</a:t>
             </a:fld>
             <a:endParaRPr lang="en-US"/>
           </a:p>
@@ -662,7 +491,7 @@
           </a:lstStyle>
           <a:p>
             <a:fld id="{2AF9C1A6-4321-41FA-B001-4140F0E2457F}" type="datetimeFigureOut">
-              <a:t>18.03.2026</a:t>
+              <a:t>21.04.2026</a:t>
             </a:fld>
             <a:endParaRPr lang="en-US"/>
           </a:p>
@@ -1298,7 +1127,7 @@
           <a:p>
             <a:fld id="{46699514-027B-49BD-8B49-5054CA40ECF4}" type="slidenum">
               <a:rPr lang="en-US"/>
-              <a:t>5</a:t>
+              <a:t>4</a:t>
             </a:fld>
             <a:endParaRPr lang="en-US"/>
           </a:p>
@@ -1357,10 +1186,10 @@
           <p:nvPr userDrawn="1"/>
         </p:nvPicPr>
         <p:blipFill>
-          <a:blip r:embed="rId2">
+          <a:blip>
             <a:extLst>
               <a:ext uri="{96DAC541-7B7A-43D3-8B79-37D633B846F1}">
-                <asvg:svgBlip xmlns:asvg="http://schemas.microsoft.com/office/drawing/2016/SVG/main" r:embed="rId3"/>
+                <asvg:svgBlip xmlns:asvg="http://schemas.microsoft.com/office/drawing/2016/SVG/main" r:embed="rId2"/>
               </a:ext>
             </a:extLst>
           </a:blip>
@@ -10918,10 +10747,10 @@
             <a:ext cx="810000" cy="320400"/>
           </a:xfrm>
           <a:blipFill>
-            <a:blip r:embed="rId2">
+            <a:blip>
               <a:extLst>
                 <a:ext uri="{96DAC541-7B7A-43D3-8B79-37D633B846F1}">
-                  <asvg:svgBlip xmlns:asvg="http://schemas.microsoft.com/office/drawing/2016/SVG/main" r:embed="rId3"/>
+                  <asvg:svgBlip xmlns:asvg="http://schemas.microsoft.com/office/drawing/2016/SVG/main" r:embed="rId2"/>
                 </a:ext>
               </a:extLst>
             </a:blip>
@@ -12200,10 +12029,10 @@
             <a:ext cx="810000" cy="320400"/>
           </a:xfrm>
           <a:blipFill>
-            <a:blip r:embed="rId2">
+            <a:blip>
               <a:extLst>
                 <a:ext uri="{96DAC541-7B7A-43D3-8B79-37D633B846F1}">
-                  <asvg:svgBlip xmlns:asvg="http://schemas.microsoft.com/office/drawing/2016/SVG/main" r:embed="rId3"/>
+                  <asvg:svgBlip xmlns:asvg="http://schemas.microsoft.com/office/drawing/2016/SVG/main" r:embed="rId2"/>
                 </a:ext>
               </a:extLst>
             </a:blip>
@@ -12444,7 +12273,7 @@
           <a:p>
             <a:fld id="{DE840A40-73C8-4048-8140-49F5D65BB431}" type="datetimeFigureOut">
               <a:rPr lang="et-EE" smtClean="0"/>
-              <a:t>18.03.2026</a:t>
+              <a:t>21.04.2026</a:t>
             </a:fld>
             <a:endParaRPr lang="et-EE"/>
           </a:p>
@@ -12557,10 +12386,10 @@
           <p:nvPr userDrawn="1"/>
         </p:nvPicPr>
         <p:blipFill>
-          <a:blip r:embed="rId2">
+          <a:blip>
             <a:extLst>
               <a:ext uri="{96DAC541-7B7A-43D3-8B79-37D633B846F1}">
-                <asvg:svgBlip xmlns:asvg="http://schemas.microsoft.com/office/drawing/2016/SVG/main" r:embed="rId3"/>
+                <asvg:svgBlip xmlns:asvg="http://schemas.microsoft.com/office/drawing/2016/SVG/main" r:embed="rId2"/>
               </a:ext>
             </a:extLst>
           </a:blip>
@@ -19539,10 +19368,10 @@
             <a:ext cx="2302064" cy="927536"/>
           </a:xfrm>
           <a:blipFill>
-            <a:blip r:embed="rId2">
+            <a:blip>
               <a:extLst>
                 <a:ext uri="{96DAC541-7B7A-43D3-8B79-37D633B846F1}">
-                  <asvg:svgBlip xmlns:asvg="http://schemas.microsoft.com/office/drawing/2016/SVG/main" r:embed="rId3"/>
+                  <asvg:svgBlip xmlns:asvg="http://schemas.microsoft.com/office/drawing/2016/SVG/main" r:embed="rId2"/>
                 </a:ext>
               </a:extLst>
             </a:blip>
@@ -19725,10 +19554,10 @@
           <p:nvPr userDrawn="1"/>
         </p:nvPicPr>
         <p:blipFill>
-          <a:blip r:embed="rId2">
+          <a:blip>
             <a:extLst>
               <a:ext uri="{96DAC541-7B7A-43D3-8B79-37D633B846F1}">
-                <asvg:svgBlip xmlns:asvg="http://schemas.microsoft.com/office/drawing/2016/SVG/main" r:embed="rId3"/>
+                <asvg:svgBlip xmlns:asvg="http://schemas.microsoft.com/office/drawing/2016/SVG/main" r:embed="rId2"/>
               </a:ext>
             </a:extLst>
           </a:blip>
@@ -20459,10 +20288,10 @@
           <p:nvPr userDrawn="1"/>
         </p:nvPicPr>
         <p:blipFill>
-          <a:blip r:embed="rId2">
+          <a:blip>
             <a:extLst>
               <a:ext uri="{96DAC541-7B7A-43D3-8B79-37D633B846F1}">
-                <asvg:svgBlip xmlns:asvg="http://schemas.microsoft.com/office/drawing/2016/SVG/main" r:embed="rId3"/>
+                <asvg:svgBlip xmlns:asvg="http://schemas.microsoft.com/office/drawing/2016/SVG/main" r:embed="rId2"/>
               </a:ext>
             </a:extLst>
           </a:blip>
@@ -21248,10 +21077,10 @@
             <a:ext cx="810000" cy="320400"/>
           </a:xfrm>
           <a:blipFill>
-            <a:blip r:embed="rId2">
+            <a:blip>
               <a:extLst>
                 <a:ext uri="{96DAC541-7B7A-43D3-8B79-37D633B846F1}">
-                  <asvg:svgBlip xmlns:asvg="http://schemas.microsoft.com/office/drawing/2016/SVG/main" r:embed="rId3"/>
+                  <asvg:svgBlip xmlns:asvg="http://schemas.microsoft.com/office/drawing/2016/SVG/main" r:embed="rId2"/>
                 </a:ext>
               </a:extLst>
             </a:blip>
@@ -24636,7 +24465,7 @@
             <p:ph sz="quarter" idx="10"/>
             <p:extLst>
               <p:ext uri="{D42A27DB-BD31-4B8C-83A1-F6EECF244321}">
-                <p14:modId xmlns:p14="http://schemas.microsoft.com/office/powerpoint/2010/main" val="2710107819"/>
+                <p14:modId xmlns:p14="http://schemas.microsoft.com/office/powerpoint/2010/main" val="3498561296"/>
               </p:ext>
             </p:extLst>
           </p:nvPr>
@@ -24681,7 +24510,7 @@
                           <a:effectLst/>
                           <a:latin typeface="Inter"/>
                         </a:rPr>
-                        <a:t>Grupitöödega</a:t>
+                        <a:t>Lõputöödega</a:t>
                       </a:r>
                       <a:r>
                         <a:rPr lang="en-US" b="0" i="0" dirty="0">
@@ -25233,18 +25062,18 @@
           <a:lstStyle/>
           <a:p>
             <a:r>
-              <a:rPr lang="en-US" b="1" err="1"/>
-              <a:t>Grupitöö</a:t>
+              <a:rPr lang="en-US" b="1" dirty="0" err="1"/>
+              <a:t>Lõputöö</a:t>
             </a:r>
             <a:r>
-              <a:rPr lang="en-US" b="1"/>
+              <a:rPr lang="en-US" b="1" dirty="0"/>
               <a:t> </a:t>
             </a:r>
             <a:r>
-              <a:rPr lang="en-US" b="1" err="1"/>
+              <a:rPr lang="en-US" b="1" dirty="0" err="1"/>
               <a:t>osad</a:t>
             </a:r>
-            <a:endParaRPr lang="en-US" err="1"/>
+            <a:endParaRPr lang="en-US" dirty="0"/>
           </a:p>
         </p:txBody>
       </p:sp>
@@ -25851,716 +25680,6 @@
         <p:cNvPr id="1" name="">
           <a:extLst>
             <a:ext uri="{FF2B5EF4-FFF2-40B4-BE49-F238E27FC236}">
-              <a16:creationId xmlns:a16="http://schemas.microsoft.com/office/drawing/2014/main" id="{8ED024B8-E587-E3FE-2649-C69E942C14B4}"/>
-            </a:ext>
-          </a:extLst>
-        </p:cNvPr>
-        <p:cNvGrpSpPr/>
-        <p:nvPr/>
-      </p:nvGrpSpPr>
-      <p:grpSpPr>
-        <a:xfrm>
-          <a:off x="0" y="0"/>
-          <a:ext cx="0" cy="0"/>
-          <a:chOff x="0" y="0"/>
-          <a:chExt cx="0" cy="0"/>
-        </a:xfrm>
-      </p:grpSpPr>
-      <p:sp>
-        <p:nvSpPr>
-          <p:cNvPr id="2" name="Title 1">
-            <a:extLst>
-              <a:ext uri="{FF2B5EF4-FFF2-40B4-BE49-F238E27FC236}">
-                <a16:creationId xmlns:a16="http://schemas.microsoft.com/office/drawing/2014/main" id="{EF462382-376F-D403-218E-FAD6D454E702}"/>
-              </a:ext>
-            </a:extLst>
-          </p:cNvPr>
-          <p:cNvSpPr>
-            <a:spLocks noGrp="1"/>
-          </p:cNvSpPr>
-          <p:nvPr>
-            <p:ph type="ctrTitle"/>
-          </p:nvPr>
-        </p:nvSpPr>
-        <p:spPr>
-          <a:xfrm>
-            <a:off x="614923" y="479570"/>
-            <a:ext cx="10044112" cy="357043"/>
-          </a:xfrm>
-        </p:spPr>
-        <p:txBody>
-          <a:bodyPr/>
-          <a:lstStyle/>
-          <a:p>
-            <a:r>
-              <a:rPr lang="en-US" b="1" dirty="0" err="1"/>
-              <a:t>Grupitöö</a:t>
-            </a:r>
-            <a:r>
-              <a:rPr lang="en-US" b="1" dirty="0"/>
-              <a:t> - GitHub</a:t>
-            </a:r>
-            <a:endParaRPr lang="en-US" dirty="0"/>
-          </a:p>
-        </p:txBody>
-      </p:sp>
-      <p:sp>
-        <p:nvSpPr>
-          <p:cNvPr id="3" name="Content Placeholder 2">
-            <a:extLst>
-              <a:ext uri="{FF2B5EF4-FFF2-40B4-BE49-F238E27FC236}">
-                <a16:creationId xmlns:a16="http://schemas.microsoft.com/office/drawing/2014/main" id="{16CF7352-F93B-EE31-220C-F9E2EC9BDA2D}"/>
-              </a:ext>
-            </a:extLst>
-          </p:cNvPr>
-          <p:cNvSpPr>
-            <a:spLocks noGrp="1"/>
-          </p:cNvSpPr>
-          <p:nvPr>
-            <p:ph sz="quarter" idx="10"/>
-          </p:nvPr>
-        </p:nvSpPr>
-        <p:spPr/>
-        <p:txBody>
-          <a:bodyPr/>
-          <a:lstStyle/>
-          <a:p>
-            <a:pPr marL="342900" indent="-342900">
-              <a:lnSpc>
-                <a:spcPct val="150000"/>
-              </a:lnSpc>
-              <a:buFont typeface="Arial,Sans-Serif" panose="020B0502030000000004" pitchFamily="34" charset="0"/>
-              <a:buChar char="•"/>
-            </a:pPr>
-            <a:r>
-              <a:rPr lang="en-US" sz="2400" dirty="0" err="1">
-                <a:ea typeface="Inter"/>
-                <a:cs typeface="Noto Serif"/>
-              </a:rPr>
-              <a:t>Looge</a:t>
-            </a:r>
-            <a:r>
-              <a:rPr lang="en-US" sz="2400" dirty="0">
-                <a:ea typeface="Inter"/>
-                <a:cs typeface="Noto Serif"/>
-              </a:rPr>
-              <a:t> </a:t>
-            </a:r>
-            <a:r>
-              <a:rPr lang="en-US" sz="2400" dirty="0" err="1">
-                <a:ea typeface="Inter"/>
-                <a:cs typeface="Noto Serif"/>
-              </a:rPr>
-              <a:t>Githubi</a:t>
-            </a:r>
-            <a:r>
-              <a:rPr lang="en-US" sz="2400" dirty="0">
-                <a:ea typeface="Inter"/>
-                <a:cs typeface="Noto Serif"/>
-              </a:rPr>
-              <a:t> </a:t>
-            </a:r>
-            <a:r>
-              <a:rPr lang="en-US" sz="2400" dirty="0" err="1">
-                <a:ea typeface="Inter"/>
-                <a:cs typeface="Noto Serif"/>
-              </a:rPr>
-              <a:t>projekt</a:t>
-            </a:r>
-            <a:r>
-              <a:rPr lang="en-US" sz="2400" dirty="0">
-                <a:ea typeface="Inter"/>
-                <a:cs typeface="Noto Serif"/>
-              </a:rPr>
-              <a:t> – </a:t>
-            </a:r>
-            <a:r>
-              <a:rPr lang="en-US" sz="2400" dirty="0" err="1">
-                <a:ea typeface="Inter"/>
-                <a:cs typeface="Noto Serif"/>
-              </a:rPr>
-              <a:t>avalik</a:t>
-            </a:r>
-            <a:r>
-              <a:rPr lang="en-US" sz="2400" dirty="0">
-                <a:ea typeface="Inter"/>
-                <a:cs typeface="Noto Serif"/>
-              </a:rPr>
-              <a:t> repository </a:t>
-            </a:r>
-            <a:r>
-              <a:rPr lang="en-US" sz="2400" dirty="0" err="1">
-                <a:ea typeface="Inter"/>
-                <a:cs typeface="Noto Serif"/>
-              </a:rPr>
-              <a:t>mõne</a:t>
-            </a:r>
-            <a:r>
-              <a:rPr lang="en-US" sz="2400" dirty="0">
-                <a:ea typeface="Inter"/>
-                <a:cs typeface="Noto Serif"/>
-              </a:rPr>
-              <a:t> </a:t>
-            </a:r>
-            <a:r>
-              <a:rPr lang="en-US" sz="2400" dirty="0" err="1">
-                <a:ea typeface="Inter"/>
-                <a:cs typeface="Noto Serif"/>
-              </a:rPr>
-              <a:t>grupiliikme</a:t>
-            </a:r>
-            <a:r>
-              <a:rPr lang="en-US" sz="2400" dirty="0">
-                <a:ea typeface="Inter"/>
-                <a:cs typeface="Noto Serif"/>
-              </a:rPr>
-              <a:t> </a:t>
-            </a:r>
-            <a:r>
-              <a:rPr lang="en-US" sz="2400" dirty="0" err="1">
-                <a:ea typeface="Inter"/>
-                <a:cs typeface="Noto Serif"/>
-              </a:rPr>
-              <a:t>Githubis</a:t>
-            </a:r>
-            <a:endParaRPr lang="en-US" sz="2400" dirty="0">
-              <a:ea typeface="Inter"/>
-              <a:cs typeface="Noto Serif"/>
-            </a:endParaRPr>
-          </a:p>
-          <a:p>
-            <a:pPr marL="342900" indent="-342900">
-              <a:lnSpc>
-                <a:spcPct val="150000"/>
-              </a:lnSpc>
-              <a:buFont typeface="Arial,Sans-Serif" panose="020B0502030000000004" pitchFamily="34" charset="0"/>
-              <a:buChar char="•"/>
-            </a:pPr>
-            <a:r>
-              <a:rPr lang="en-US" sz="2400" dirty="0" err="1">
-                <a:ea typeface="Inter"/>
-                <a:cs typeface="Noto Serif"/>
-              </a:rPr>
-              <a:t>Lisage</a:t>
-            </a:r>
-            <a:r>
-              <a:rPr lang="en-US" sz="2400" dirty="0">
-                <a:ea typeface="Inter"/>
-                <a:cs typeface="Noto Serif"/>
-              </a:rPr>
-              <a:t> </a:t>
-            </a:r>
-            <a:r>
-              <a:rPr lang="en-US" sz="2400" dirty="0" err="1">
-                <a:ea typeface="Inter"/>
-                <a:cs typeface="Noto Serif"/>
-              </a:rPr>
-              <a:t>teised</a:t>
-            </a:r>
-            <a:r>
-              <a:rPr lang="en-US" sz="2400" dirty="0">
-                <a:ea typeface="Inter"/>
-                <a:cs typeface="Noto Serif"/>
-              </a:rPr>
-              <a:t> </a:t>
-            </a:r>
-            <a:r>
-              <a:rPr lang="en-US" sz="2400" dirty="0" err="1">
-                <a:ea typeface="Inter"/>
-                <a:cs typeface="Noto Serif"/>
-              </a:rPr>
-              <a:t>grupiliikmed</a:t>
-            </a:r>
-            <a:r>
-              <a:rPr lang="en-US" sz="2400" dirty="0">
-                <a:ea typeface="Inter"/>
-                <a:cs typeface="Noto Serif"/>
-              </a:rPr>
-              <a:t> Collaborators </a:t>
-            </a:r>
-            <a:r>
-              <a:rPr lang="en-US" sz="2400" dirty="0" err="1">
-                <a:ea typeface="Inter"/>
-                <a:cs typeface="Noto Serif"/>
-              </a:rPr>
-              <a:t>alla</a:t>
-            </a:r>
-            <a:endParaRPr lang="en-US" dirty="0">
-              <a:cs typeface="Noto Serif"/>
-            </a:endParaRPr>
-          </a:p>
-          <a:p>
-            <a:pPr marL="342900" indent="-342900">
-              <a:lnSpc>
-                <a:spcPct val="150000"/>
-              </a:lnSpc>
-              <a:buClr>
-                <a:srgbClr val="121212"/>
-              </a:buClr>
-              <a:buFont typeface="Arial,Sans-Serif" panose="020B0502030000000004" pitchFamily="34" charset="0"/>
-              <a:buChar char="•"/>
-            </a:pPr>
-            <a:r>
-              <a:rPr lang="en-US" sz="2400" dirty="0">
-                <a:ea typeface="Inter"/>
-                <a:cs typeface="Noto Serif"/>
-              </a:rPr>
-              <a:t>Clone repository </a:t>
-            </a:r>
-            <a:r>
-              <a:rPr lang="en-US" sz="2400" dirty="0" err="1">
-                <a:ea typeface="Inter"/>
-                <a:cs typeface="Noto Serif"/>
-              </a:rPr>
-              <a:t>oma</a:t>
-            </a:r>
-            <a:r>
-              <a:rPr lang="en-US" sz="2400" dirty="0">
-                <a:ea typeface="Inter"/>
-                <a:cs typeface="Noto Serif"/>
-              </a:rPr>
-              <a:t> </a:t>
-            </a:r>
-            <a:r>
-              <a:rPr lang="en-US" sz="2400" dirty="0" err="1">
-                <a:ea typeface="Inter"/>
-                <a:cs typeface="Noto Serif"/>
-              </a:rPr>
-              <a:t>kohalikku</a:t>
-            </a:r>
-            <a:r>
-              <a:rPr lang="en-US" sz="2400" dirty="0">
-                <a:ea typeface="Inter"/>
-                <a:cs typeface="Noto Serif"/>
-              </a:rPr>
-              <a:t> </a:t>
-            </a:r>
-            <a:r>
-              <a:rPr lang="en-US" sz="2400" dirty="0" err="1">
-                <a:ea typeface="Inter"/>
-                <a:cs typeface="Noto Serif"/>
-              </a:rPr>
-              <a:t>arvutisse</a:t>
-            </a:r>
-            <a:endParaRPr lang="en-US" sz="2400" dirty="0" err="1">
-              <a:cs typeface="Noto Serif"/>
-            </a:endParaRPr>
-          </a:p>
-          <a:p>
-            <a:pPr marL="342900" indent="-342900">
-              <a:lnSpc>
-                <a:spcPct val="150000"/>
-              </a:lnSpc>
-              <a:buClr>
-                <a:srgbClr val="121212"/>
-              </a:buClr>
-              <a:buFont typeface="Arial,Sans-Serif" panose="020B0502030000000004" pitchFamily="34" charset="0"/>
-              <a:buChar char="•"/>
-            </a:pPr>
-            <a:r>
-              <a:rPr lang="en-US" sz="2400" dirty="0" err="1">
-                <a:ea typeface="Inter"/>
-                <a:cs typeface="Noto Serif"/>
-              </a:rPr>
-              <a:t>Leppige</a:t>
-            </a:r>
-            <a:r>
-              <a:rPr lang="en-US" sz="2400" dirty="0">
-                <a:ea typeface="Inter"/>
-                <a:cs typeface="Noto Serif"/>
-              </a:rPr>
-              <a:t> </a:t>
-            </a:r>
-            <a:r>
-              <a:rPr lang="en-US" sz="2400" dirty="0" err="1">
-                <a:ea typeface="Inter"/>
-                <a:cs typeface="Noto Serif"/>
-              </a:rPr>
-              <a:t>kokku</a:t>
-            </a:r>
-            <a:r>
-              <a:rPr lang="en-US" sz="2400" dirty="0">
-                <a:ea typeface="Inter"/>
-                <a:cs typeface="Noto Serif"/>
-              </a:rPr>
-              <a:t>, </a:t>
-            </a:r>
-            <a:r>
-              <a:rPr lang="en-US" sz="2400" dirty="0" err="1">
-                <a:ea typeface="Inter"/>
-                <a:cs typeface="Noto Serif"/>
-              </a:rPr>
-              <a:t>kuidas</a:t>
-            </a:r>
-            <a:r>
-              <a:rPr lang="en-US" sz="2400" dirty="0">
-                <a:ea typeface="Inter"/>
-                <a:cs typeface="Noto Serif"/>
-              </a:rPr>
-              <a:t> </a:t>
-            </a:r>
-            <a:r>
-              <a:rPr lang="en-US" sz="2400" dirty="0" err="1">
-                <a:ea typeface="Inter"/>
-                <a:cs typeface="Noto Serif"/>
-              </a:rPr>
-              <a:t>muutusi</a:t>
-            </a:r>
-            <a:r>
-              <a:rPr lang="en-US" sz="2400" dirty="0">
-                <a:ea typeface="Inter"/>
-                <a:cs typeface="Noto Serif"/>
-              </a:rPr>
-              <a:t> </a:t>
-            </a:r>
-            <a:r>
-              <a:rPr lang="en-US" sz="2400" dirty="0" err="1">
-                <a:ea typeface="Inter"/>
-                <a:cs typeface="Noto Serif"/>
-              </a:rPr>
-              <a:t>üles</a:t>
-            </a:r>
-            <a:r>
-              <a:rPr lang="en-US" sz="2400" dirty="0">
-                <a:ea typeface="Inter"/>
-                <a:cs typeface="Noto Serif"/>
-              </a:rPr>
-              <a:t> </a:t>
-            </a:r>
-            <a:r>
-              <a:rPr lang="en-US" sz="2400" dirty="0" err="1">
-                <a:ea typeface="Inter"/>
-                <a:cs typeface="Noto Serif"/>
-              </a:rPr>
-              <a:t>laete</a:t>
-            </a:r>
-            <a:endParaRPr lang="en-US" sz="2400" dirty="0" err="1">
-              <a:cs typeface="Noto Serif"/>
-            </a:endParaRPr>
-          </a:p>
-          <a:p>
-            <a:pPr marL="857250" lvl="1" indent="-342900">
-              <a:lnSpc>
-                <a:spcPct val="150000"/>
-              </a:lnSpc>
-              <a:buFont typeface="Arial,Sans-Serif" panose="020B0502030000000004" pitchFamily="34" charset="0"/>
-              <a:buChar char="o"/>
-            </a:pPr>
-            <a:r>
-              <a:rPr lang="en-US" sz="2400" dirty="0" err="1">
-                <a:ea typeface="Inter"/>
-                <a:cs typeface="Noto Serif"/>
-              </a:rPr>
-              <a:t>Nt</a:t>
-            </a:r>
-            <a:r>
-              <a:rPr lang="en-US" sz="2400" dirty="0">
-                <a:ea typeface="Inter"/>
-                <a:cs typeface="Noto Serif"/>
-              </a:rPr>
-              <a:t> </a:t>
-            </a:r>
-            <a:r>
-              <a:rPr lang="en-US" sz="2400" dirty="0" err="1">
-                <a:ea typeface="Inter"/>
-                <a:cs typeface="Noto Serif"/>
-              </a:rPr>
-              <a:t>iga</a:t>
-            </a:r>
-            <a:r>
-              <a:rPr lang="en-US" sz="2400" dirty="0">
-                <a:ea typeface="Inter"/>
-                <a:cs typeface="Noto Serif"/>
-              </a:rPr>
-              <a:t> </a:t>
-            </a:r>
-            <a:r>
-              <a:rPr lang="en-US" sz="2400" dirty="0" err="1">
-                <a:ea typeface="Inter"/>
-                <a:cs typeface="Noto Serif"/>
-              </a:rPr>
-              <a:t>uue</a:t>
-            </a:r>
-            <a:r>
-              <a:rPr lang="en-US" sz="2400" dirty="0">
-                <a:ea typeface="Inter"/>
-                <a:cs typeface="Noto Serif"/>
-              </a:rPr>
-              <a:t> </a:t>
-            </a:r>
-            <a:r>
-              <a:rPr lang="en-US" sz="2400" dirty="0" err="1">
-                <a:ea typeface="Inter"/>
-                <a:cs typeface="Noto Serif"/>
-              </a:rPr>
-              <a:t>funktsionaalsuse</a:t>
-            </a:r>
-            <a:r>
-              <a:rPr lang="en-US" sz="2400" dirty="0">
-                <a:ea typeface="Inter"/>
-                <a:cs typeface="Noto Serif"/>
-              </a:rPr>
-              <a:t> </a:t>
-            </a:r>
-            <a:r>
-              <a:rPr lang="en-US" sz="2400" dirty="0" err="1">
-                <a:ea typeface="Inter"/>
-                <a:cs typeface="Noto Serif"/>
-              </a:rPr>
-              <a:t>jaoks</a:t>
-            </a:r>
-            <a:r>
-              <a:rPr lang="en-US" sz="2400" dirty="0">
-                <a:ea typeface="Inter"/>
-                <a:cs typeface="Noto Serif"/>
-              </a:rPr>
-              <a:t> </a:t>
-            </a:r>
-            <a:r>
-              <a:rPr lang="en-US" sz="2400" dirty="0" err="1">
-                <a:ea typeface="Inter"/>
-                <a:cs typeface="Noto Serif"/>
-              </a:rPr>
-              <a:t>eraldi</a:t>
-            </a:r>
-            <a:r>
-              <a:rPr lang="en-US" sz="2400" dirty="0">
-                <a:ea typeface="Inter"/>
-                <a:cs typeface="Noto Serif"/>
-              </a:rPr>
-              <a:t> "feature/..." Branch</a:t>
-            </a:r>
-            <a:endParaRPr lang="en-US" sz="2400" dirty="0">
-              <a:cs typeface="Noto Serif"/>
-            </a:endParaRPr>
-          </a:p>
-          <a:p>
-            <a:pPr marL="857250" lvl="1" indent="-342900">
-              <a:lnSpc>
-                <a:spcPct val="150000"/>
-              </a:lnSpc>
-              <a:buFont typeface="Arial,Sans-Serif" panose="020B0502030000000004" pitchFamily="34" charset="0"/>
-              <a:buChar char="o"/>
-            </a:pPr>
-            <a:r>
-              <a:rPr lang="en-US" sz="2400" dirty="0">
-                <a:ea typeface="Inter"/>
-                <a:cs typeface="Noto Serif"/>
-              </a:rPr>
-              <a:t>Kui </a:t>
-            </a:r>
-            <a:r>
-              <a:rPr lang="en-US" sz="2400" dirty="0" err="1">
-                <a:ea typeface="Inter"/>
-                <a:cs typeface="Noto Serif"/>
-              </a:rPr>
-              <a:t>iga</a:t>
-            </a:r>
-            <a:r>
-              <a:rPr lang="en-US" sz="2400" dirty="0">
-                <a:ea typeface="Inter"/>
-                <a:cs typeface="Noto Serif"/>
-              </a:rPr>
-              <a:t> </a:t>
-            </a:r>
-            <a:r>
-              <a:rPr lang="en-US" sz="2400" dirty="0" err="1">
-                <a:ea typeface="Inter"/>
-                <a:cs typeface="Noto Serif"/>
-              </a:rPr>
-              <a:t>funktsionaalsuse</a:t>
-            </a:r>
-            <a:r>
-              <a:rPr lang="en-US" sz="2400" dirty="0">
-                <a:ea typeface="Inter"/>
-                <a:cs typeface="Noto Serif"/>
-              </a:rPr>
-              <a:t> </a:t>
-            </a:r>
-            <a:r>
-              <a:rPr lang="en-US" sz="2400" dirty="0" err="1">
-                <a:ea typeface="Inter"/>
-                <a:cs typeface="Noto Serif"/>
-              </a:rPr>
-              <a:t>jaoks</a:t>
-            </a:r>
-            <a:r>
-              <a:rPr lang="en-US" sz="2400" dirty="0">
-                <a:ea typeface="Inter"/>
-                <a:cs typeface="Noto Serif"/>
-              </a:rPr>
-              <a:t> </a:t>
-            </a:r>
-            <a:r>
-              <a:rPr lang="en-US" sz="2400" dirty="0" err="1">
-                <a:ea typeface="Inter"/>
-                <a:cs typeface="Noto Serif"/>
-              </a:rPr>
-              <a:t>eraldi</a:t>
-            </a:r>
-            <a:r>
-              <a:rPr lang="en-US" sz="2400" dirty="0">
-                <a:ea typeface="Inter"/>
-                <a:cs typeface="Noto Serif"/>
-              </a:rPr>
-              <a:t> branch, </a:t>
-            </a:r>
-            <a:r>
-              <a:rPr lang="en-US" sz="2400" dirty="0" err="1">
-                <a:ea typeface="Inter"/>
-                <a:cs typeface="Noto Serif"/>
-              </a:rPr>
-              <a:t>siis</a:t>
-            </a:r>
-            <a:r>
-              <a:rPr lang="en-US" sz="2400" dirty="0">
-                <a:ea typeface="Inter"/>
-                <a:cs typeface="Noto Serif"/>
-              </a:rPr>
-              <a:t> </a:t>
-            </a:r>
-            <a:r>
-              <a:rPr lang="en-US" sz="2400" dirty="0" err="1">
-                <a:ea typeface="Inter"/>
-                <a:cs typeface="Noto Serif"/>
-              </a:rPr>
-              <a:t>pärast</a:t>
-            </a:r>
-            <a:r>
-              <a:rPr lang="en-US" sz="2400" dirty="0">
-                <a:ea typeface="Inter"/>
-                <a:cs typeface="Noto Serif"/>
-              </a:rPr>
-              <a:t> Pull </a:t>
-            </a:r>
-            <a:r>
-              <a:rPr lang="en-US" sz="2400" dirty="0" err="1">
-                <a:ea typeface="Inter"/>
-                <a:cs typeface="Noto Serif"/>
-              </a:rPr>
-              <a:t>Request'I</a:t>
-            </a:r>
-            <a:r>
-              <a:rPr lang="en-US" sz="2400" dirty="0">
-                <a:ea typeface="Inter"/>
-                <a:cs typeface="Noto Serif"/>
-              </a:rPr>
-              <a:t> </a:t>
-            </a:r>
-            <a:r>
-              <a:rPr lang="en-US" sz="2400" dirty="0" err="1">
-                <a:ea typeface="Inter"/>
-                <a:cs typeface="Noto Serif"/>
-              </a:rPr>
-              <a:t>kustutada</a:t>
-            </a:r>
-            <a:r>
-              <a:rPr lang="en-US" sz="2400" dirty="0">
-                <a:ea typeface="Inter"/>
-                <a:cs typeface="Noto Serif"/>
-              </a:rPr>
-              <a:t> feature branch</a:t>
-            </a:r>
-            <a:endParaRPr lang="en-US" sz="2400" dirty="0">
-              <a:cs typeface="Noto Serif"/>
-            </a:endParaRPr>
-          </a:p>
-          <a:p>
-            <a:pPr marL="342900" indent="-342900">
-              <a:lnSpc>
-                <a:spcPct val="150000"/>
-              </a:lnSpc>
-              <a:buClr>
-                <a:srgbClr val="121212"/>
-              </a:buClr>
-              <a:buFont typeface="Arial,Sans-Serif" panose="020B0502030000000004" pitchFamily="34" charset="0"/>
-              <a:buChar char="•"/>
-            </a:pPr>
-            <a:endParaRPr lang="en-US" sz="2400" dirty="0">
-              <a:cs typeface="Noto Serif"/>
-            </a:endParaRPr>
-          </a:p>
-          <a:p>
-            <a:pPr marL="342900" indent="-342900">
-              <a:lnSpc>
-                <a:spcPct val="150000"/>
-              </a:lnSpc>
-              <a:buClr>
-                <a:srgbClr val="121212"/>
-              </a:buClr>
-              <a:buFont typeface="Arial,Sans-Serif" panose="020B0502030000000004" pitchFamily="34" charset="0"/>
-              <a:buChar char="•"/>
-            </a:pPr>
-            <a:endParaRPr lang="en-US" sz="2400" dirty="0">
-              <a:cs typeface="Arial"/>
-            </a:endParaRPr>
-          </a:p>
-          <a:p>
-            <a:pPr marL="857250" lvl="1" indent="-342900">
-              <a:lnSpc>
-                <a:spcPct val="150000"/>
-              </a:lnSpc>
-              <a:buFont typeface="Arial,Sans-Serif" panose="020B0502030000000004" pitchFamily="34" charset="0"/>
-              <a:buChar char="o"/>
-            </a:pPr>
-            <a:endParaRPr lang="en-US" sz="2400" dirty="0">
-              <a:cs typeface="Arial"/>
-            </a:endParaRPr>
-          </a:p>
-          <a:p>
-            <a:pPr marL="342900" indent="-342900">
-              <a:lnSpc>
-                <a:spcPct val="150000"/>
-              </a:lnSpc>
-              <a:buFont typeface="Arial,Sans-Serif" panose="020B0502030000000004" pitchFamily="34" charset="0"/>
-              <a:buChar char="•"/>
-            </a:pPr>
-            <a:endParaRPr lang="en-US" sz="2400" dirty="0">
-              <a:cs typeface="Arial"/>
-            </a:endParaRPr>
-          </a:p>
-          <a:p>
-            <a:pPr marL="514350" indent="-514350">
-              <a:lnSpc>
-                <a:spcPct val="150000"/>
-              </a:lnSpc>
-            </a:pPr>
-            <a:endParaRPr lang="en-US" sz="2800" dirty="0">
-              <a:cs typeface="Arial"/>
-            </a:endParaRPr>
-          </a:p>
-          <a:p>
-            <a:pPr marL="0" indent="0">
-              <a:lnSpc>
-                <a:spcPct val="150000"/>
-              </a:lnSpc>
-              <a:buNone/>
-            </a:pPr>
-            <a:endParaRPr lang="en-US" sz="2800" dirty="0"/>
-          </a:p>
-        </p:txBody>
-      </p:sp>
-    </p:spTree>
-    <p:extLst>
-      <p:ext uri="{BB962C8B-B14F-4D97-AF65-F5344CB8AC3E}">
-        <p14:creationId xmlns:p14="http://schemas.microsoft.com/office/powerpoint/2010/main" val="1674079011"/>
-      </p:ext>
-    </p:extLst>
-  </p:cSld>
-  <p:clrMapOvr>
-    <a:masterClrMapping/>
-  </p:clrMapOvr>
-</p:sld>
-</file>
-
-<file path=ppt/slides/slide5.xml><?xml version="1.0" encoding="utf-8"?>
-<p:sld xmlns:a="http://schemas.openxmlformats.org/drawingml/2006/main" xmlns:r="http://schemas.openxmlformats.org/officeDocument/2006/relationships" xmlns:p="http://schemas.openxmlformats.org/presentationml/2006/main">
-  <p:cSld>
-    <p:spTree>
-      <p:nvGrpSpPr>
-        <p:cNvPr id="1" name="">
-          <a:extLst>
-            <a:ext uri="{FF2B5EF4-FFF2-40B4-BE49-F238E27FC236}">
               <a16:creationId xmlns:a16="http://schemas.microsoft.com/office/drawing/2014/main" id="{AA80EE9B-3020-A266-14D5-3A10FD23920C}"/>
             </a:ext>
           </a:extLst>
@@ -26724,6 +25843,30 @@
               <a:rPr lang="en-US" sz="2400" dirty="0">
                 <a:ea typeface="Inter"/>
               </a:rPr>
+              <a:t> Branch </a:t>
+            </a:r>
+            <a:r>
+              <a:rPr lang="en-US" sz="2400" dirty="0" err="1">
+                <a:ea typeface="Inter"/>
+              </a:rPr>
+              <a:t>või</a:t>
+            </a:r>
+            <a:r>
+              <a:rPr lang="en-US" sz="2400" dirty="0">
+                <a:ea typeface="Inter"/>
+              </a:rPr>
+              <a:t> loo </a:t>
+            </a:r>
+            <a:r>
+              <a:rPr lang="en-US" sz="2400" dirty="0" err="1">
+                <a:ea typeface="Inter"/>
+              </a:rPr>
+              <a:t>uus</a:t>
+            </a:r>
+            <a:r>
+              <a:rPr lang="en-US" sz="2400" dirty="0">
+                <a:ea typeface="Inter"/>
+              </a:rPr>
               <a:t> Branch</a:t>
             </a:r>
             <a:endParaRPr lang="en-US" dirty="0"/>
@@ -26763,7 +25906,7 @@
               <a:t>VS Code: Lisa </a:t>
             </a:r>
             <a:r>
-              <a:rPr lang="en-US" sz="2400" err="1">
+              <a:rPr lang="en-US" sz="2400" dirty="0" err="1">
                 <a:ea typeface="Inter"/>
               </a:rPr>
               <a:t>kommentaar</a:t>
@@ -26805,7 +25948,7 @@
               <a:buAutoNum type="arabicPeriod"/>
             </a:pPr>
             <a:r>
-              <a:rPr lang="en-US" sz="2400" err="1">
+              <a:rPr lang="en-US" sz="2400" dirty="0" err="1">
                 <a:ea typeface="Inter"/>
               </a:rPr>
               <a:t>Github</a:t>
@@ -26817,10 +25960,10 @@
               <a:t>: Vali </a:t>
             </a:r>
             <a:r>
-              <a:rPr lang="en-US" sz="2400" err="1">
+              <a:rPr lang="en-US" sz="2400" dirty="0" err="1">
                 <a:ea typeface="Inter"/>
               </a:rPr>
-              <a:t>enda</a:t>
+              <a:t>loodud</a:t>
             </a:r>
             <a:r>
               <a:rPr lang="en-US" sz="2400" dirty="0">
@@ -26907,7 +26050,7 @@
               </a:buClr>
               <a:buAutoNum type="arabicPeriod"/>
             </a:pPr>
-            <a:endParaRPr lang="en-US"/>
+            <a:endParaRPr lang="en-US" dirty="0"/>
           </a:p>
         </p:txBody>
       </p:sp>
@@ -28190,6 +27333,21 @@
 </file>
 
 <file path=customXml/item1.xml><?xml version="1.0" encoding="utf-8"?>
+<?mso-contentType ?>
+<FormTemplates xmlns="http://schemas.microsoft.com/sharepoint/v3/contenttype/forms">
+  <Display>DocumentLibraryForm</Display>
+  <Edit>DocumentLibraryForm</Edit>
+  <New>DocumentLibraryForm</New>
+</FormTemplates>
+</file>
+
+<file path=customXml/item2.xml><?xml version="1.0" encoding="utf-8"?>
+<p:properties xmlns:p="http://schemas.microsoft.com/office/2006/metadata/properties" xmlns:xsi="http://www.w3.org/2001/XMLSchema-instance" xmlns:pc="http://schemas.microsoft.com/office/infopath/2007/PartnerControls">
+  <documentManagement/>
+</p:properties>
+</file>
+
+<file path=customXml/item3.xml><?xml version="1.0" encoding="utf-8"?>
 <ct:contentTypeSchema xmlns:ct="http://schemas.microsoft.com/office/2006/metadata/contentType" xmlns:ma="http://schemas.microsoft.com/office/2006/metadata/properties/metaAttributes" ct:_="" ma:_="" ma:contentTypeName="Document" ma:contentTypeID="0x010100C4D27B8FA8976546BCD79313C588588D" ma:contentTypeVersion="8" ma:contentTypeDescription="Create a new document." ma:contentTypeScope="" ma:versionID="a112c56f6fe148a79025c76584832af0">
   <xsd:schema xmlns:xsd="http://www.w3.org/2001/XMLSchema" xmlns:xs="http://www.w3.org/2001/XMLSchema" xmlns:p="http://schemas.microsoft.com/office/2006/metadata/properties" xmlns:ns2="a1a2d923-8fea-42f1-bd41-9cdfff65694e" targetNamespace="http://schemas.microsoft.com/office/2006/metadata/properties" ma:root="true" ma:fieldsID="97c8655d467eaa9470a714421e7268c0" ns2:_="">
     <xsd:import namespace="a1a2d923-8fea-42f1-bd41-9cdfff65694e"/>
@@ -28357,22 +27515,24 @@
 </ct:contentTypeSchema>
 </file>
 
-<file path=customXml/item2.xml><?xml version="1.0" encoding="utf-8"?>
-<p:properties xmlns:p="http://schemas.microsoft.com/office/2006/metadata/properties" xmlns:xsi="http://www.w3.org/2001/XMLSchema-instance" xmlns:pc="http://schemas.microsoft.com/office/infopath/2007/PartnerControls">
-  <documentManagement/>
-</p:properties>
+<file path=customXml/itemProps1.xml><?xml version="1.0" encoding="utf-8"?>
+<ds:datastoreItem xmlns:ds="http://schemas.openxmlformats.org/officeDocument/2006/customXml" ds:itemID="{9DC439CA-6F1C-4005-ACA6-A52E04DEE0A7}">
+  <ds:schemaRefs>
+    <ds:schemaRef ds:uri="http://schemas.microsoft.com/sharepoint/v3/contenttype/forms"/>
+  </ds:schemaRefs>
+</ds:datastoreItem>
 </file>
 
-<file path=customXml/item3.xml><?xml version="1.0" encoding="utf-8"?>
-<?mso-contentType ?>
-<FormTemplates xmlns="http://schemas.microsoft.com/sharepoint/v3/contenttype/forms">
-  <Display>DocumentLibraryForm</Display>
-  <Edit>DocumentLibraryForm</Edit>
-  <New>DocumentLibraryForm</New>
-</FormTemplates>
+<file path=customXml/itemProps2.xml><?xml version="1.0" encoding="utf-8"?>
+<ds:datastoreItem xmlns:ds="http://schemas.openxmlformats.org/officeDocument/2006/customXml" ds:itemID="{5BDF4908-A52A-47DD-A794-6E02D71942FC}">
+  <ds:schemaRefs>
+    <ds:schemaRef ds:uri="http://schemas.microsoft.com/office/2006/metadata/properties"/>
+    <ds:schemaRef ds:uri="http://schemas.microsoft.com/office/infopath/2007/PartnerControls"/>
+  </ds:schemaRefs>
+</ds:datastoreItem>
 </file>
 
-<file path=customXml/itemProps1.xml><?xml version="1.0" encoding="utf-8"?>
+<file path=customXml/itemProps3.xml><?xml version="1.0" encoding="utf-8"?>
 <ds:datastoreItem xmlns:ds="http://schemas.openxmlformats.org/officeDocument/2006/customXml" ds:itemID="{9CF4F972-2392-44D0-AA45-41AC4FDC4A59}">
   <ds:schemaRefs>
     <ds:schemaRef ds:uri="a1a2d923-8fea-42f1-bd41-9cdfff65694e"/>
@@ -28388,21 +27548,4 @@
     <ds:schemaRef ds:uri="http://www.w3.org/2001/XMLSchema"/>
   </ds:schemaRefs>
 </ds:datastoreItem>
-</file>
-
-<file path=customXml/itemProps2.xml><?xml version="1.0" encoding="utf-8"?>
-<ds:datastoreItem xmlns:ds="http://schemas.openxmlformats.org/officeDocument/2006/customXml" ds:itemID="{5BDF4908-A52A-47DD-A794-6E02D71942FC}">
-  <ds:schemaRefs>
-    <ds:schemaRef ds:uri="http://schemas.microsoft.com/office/2006/metadata/properties"/>
-    <ds:schemaRef ds:uri="http://schemas.microsoft.com/office/infopath/2007/PartnerControls"/>
-  </ds:schemaRefs>
-</ds:datastoreItem>
-</file>
-
-<file path=customXml/itemProps3.xml><?xml version="1.0" encoding="utf-8"?>
-<ds:datastoreItem xmlns:ds="http://schemas.openxmlformats.org/officeDocument/2006/customXml" ds:itemID="{9DC439CA-6F1C-4005-ACA6-A52E04DEE0A7}">
-  <ds:schemaRefs>
-    <ds:schemaRef ds:uri="http://schemas.microsoft.com/sharepoint/v3/contenttype/forms"/>
-  </ds:schemaRefs>
-</ds:datastoreItem>
 </file>